--- a/dist/초3/수학/분수와소수/초3_수학_분수와소수_05_진분수·가분수·대분수.pptx
+++ b/dist/초3/수학/분수와소수/초3_수학_분수와소수_05_진분수·가분수·대분수.pptx
@@ -121,13 +121,13 @@
   <p:extLst>
     <p:ext uri="{521415D9-36F7-43E2-AB2F-B90AF26B5E84}">
       <p14:sectionLst xmlns:p14="http://schemas.microsoft.com/office/powerpoint/2010/main">
-        <p14:section name="도입" id="{2f787b57-a51d-1286-1073-009d65bc7e0a}">
+        <p14:section name="도입" id="{bd10ca98-64ef-add9-77af-138461f2c4fb}">
           <p14:sldIdLst>
             <p14:sldId id="256"/>
             <p14:sldId id="257"/>
           </p14:sldIdLst>
         </p14:section>
-        <p14:section name="개념" id="{7701f948-91b4-0f98-fcf5-209539109f96}">
+        <p14:section name="개념" id="{fdb4656e-96f7-1424-bc51-1d31f0687a1a}">
           <p14:sldIdLst>
             <p14:sldId id="258"/>
             <p14:sldId id="259"/>
@@ -136,32 +136,32 @@
             <p14:sldId id="264"/>
           </p14:sldIdLst>
         </p14:section>
-        <p14:section name="연습" id="{96794bae-13ab-b693-52bc-c57b9d8bc72c}">
+        <p14:section name="연습" id="{c58383ac-edab-2095-51df-ba3d3cb031eb}">
           <p14:sldIdLst>
             <p14:sldId id="261"/>
             <p14:sldId id="262"/>
             <p14:sldId id="265"/>
           </p14:sldIdLst>
         </p14:section>
-        <p14:section name="개념" id="{5df5a169-6003-da10-f938-481ecfb0e4ce}">
+        <p14:section name="개념" id="{4cdd5f2e-ab8c-3f5e-48e5-9afedd912232}">
           <p14:sldIdLst/>
         </p14:section>
-        <p14:section name="연습" id="{6023f735-361e-f2ee-60ff-654f9e936b3f}">
+        <p14:section name="연습" id="{35ae9729-9ad1-74ee-a7f8-ced8ec152514}">
           <p14:sldIdLst/>
         </p14:section>
-        <p14:section name="확인" id="{5480dc67-c2ac-de0e-fa8f-31ab0e7257cd}">
+        <p14:section name="확인" id="{37c6a822-96b5-9a7a-8323-bd7bb74782ba}">
           <p14:sldIdLst>
             <p14:sldId id="266"/>
             <p14:sldId id="267"/>
             <p14:sldId id="268"/>
           </p14:sldIdLst>
         </p14:section>
-        <p14:section name="정리" id="{c165cd5d-43dc-c775-06a0-16906f86108d}">
+        <p14:section name="정리" id="{b97a779a-dd08-81fa-87fe-1d4f6c77dcd1}">
           <p14:sldIdLst>
             <p14:sldId id="269"/>
           </p14:sldIdLst>
         </p14:section>
-        <p14:section name="보충" id="{f9bd1b7c-87bb-3005-3269-01c6a957e82d}">
+        <p14:section name="보충" id="{6c16e13e-0c64-c1b7-df29-a440db43907a}">
           <p14:sldIdLst>
             <p14:sldId id="270"/>
           </p14:sldIdLst>
@@ -3074,7 +3074,7 @@
               <a:buNone/>
             </a:pPr>
             <a:r>
-              <a:rPr lang="ko-KR" altLang="en-US" sz="4600" b="1" dirty="0">
+              <a:rPr lang="ko-KR" altLang="en-US" sz="4400" b="1" dirty="0">
                 <a:solidFill>
                   <a:srgbClr val="FFFFFF"/>
                 </a:solidFill>
@@ -3722,7 +3722,7 @@
         <p:spPr>
           <a:xfrm>
             <a:off x="1344168" y="2197100"/>
-            <a:ext cx="532384" cy="1092200"/>
+            <a:ext cx="541020" cy="1092200"/>
           </a:xfrm>
           <a:prstGeom prst="rect">
             <a:avLst/>
@@ -3760,7 +3760,7 @@
         </p:nvSpPr>
         <p:spPr>
           <a:xfrm>
-            <a:off x="1986280" y="2197100"/>
+            <a:off x="1994916" y="2197100"/>
             <a:ext cx="563118" cy="509524"/>
           </a:xfrm>
           <a:prstGeom prst="rect">
@@ -3799,7 +3799,7 @@
         </p:nvSpPr>
         <p:spPr>
           <a:xfrm>
-            <a:off x="2022856" y="2743200"/>
+            <a:off x="2031492" y="2743200"/>
             <a:ext cx="489966" cy="0"/>
           </a:xfrm>
           <a:prstGeom prst="line">
@@ -3822,7 +3822,7 @@
         </p:nvSpPr>
         <p:spPr>
           <a:xfrm>
-            <a:off x="1986280" y="2779776"/>
+            <a:off x="1994916" y="2779776"/>
             <a:ext cx="563118" cy="509524"/>
           </a:xfrm>
           <a:prstGeom prst="rect">
@@ -3861,7 +3861,7 @@
         </p:nvSpPr>
         <p:spPr>
           <a:xfrm>
-            <a:off x="2659126" y="2197100"/>
+            <a:off x="2667762" y="2197100"/>
             <a:ext cx="437388" cy="1092200"/>
           </a:xfrm>
           <a:prstGeom prst="rect">
@@ -3900,7 +3900,7 @@
         </p:nvSpPr>
         <p:spPr>
           <a:xfrm>
-            <a:off x="3299277" y="2263338"/>
+            <a:off x="3307913" y="2263338"/>
             <a:ext cx="377048" cy="377048"/>
           </a:xfrm>
           <a:prstGeom prst="rect">
@@ -3925,7 +3925,7 @@
         </p:nvSpPr>
         <p:spPr>
           <a:xfrm>
-            <a:off x="3242818" y="2743200"/>
+            <a:off x="3251454" y="2743200"/>
             <a:ext cx="489966" cy="0"/>
           </a:xfrm>
           <a:prstGeom prst="line">
@@ -3948,7 +3948,7 @@
         </p:nvSpPr>
         <p:spPr>
           <a:xfrm>
-            <a:off x="3206242" y="2779776"/>
+            <a:off x="3214878" y="2779776"/>
             <a:ext cx="563118" cy="509524"/>
           </a:xfrm>
           <a:prstGeom prst="rect">
@@ -4035,7 +4035,7 @@
         <p:spPr>
           <a:xfrm>
             <a:off x="7072884" y="2197100"/>
-            <a:ext cx="532384" cy="1092200"/>
+            <a:ext cx="541020" cy="1092200"/>
           </a:xfrm>
           <a:prstGeom prst="rect">
             <a:avLst/>
@@ -4073,7 +4073,7 @@
         </p:nvSpPr>
         <p:spPr>
           <a:xfrm>
-            <a:off x="7714996" y="2197100"/>
+            <a:off x="7723632" y="2197100"/>
             <a:ext cx="563118" cy="509524"/>
           </a:xfrm>
           <a:prstGeom prst="rect">
@@ -4112,7 +4112,7 @@
         </p:nvSpPr>
         <p:spPr>
           <a:xfrm>
-            <a:off x="7751572" y="2743200"/>
+            <a:off x="7760208" y="2743200"/>
             <a:ext cx="489966" cy="0"/>
           </a:xfrm>
           <a:prstGeom prst="line">
@@ -4135,7 +4135,7 @@
         </p:nvSpPr>
         <p:spPr>
           <a:xfrm>
-            <a:off x="7714996" y="2779776"/>
+            <a:off x="7723632" y="2779776"/>
             <a:ext cx="563118" cy="509524"/>
           </a:xfrm>
           <a:prstGeom prst="rect">
@@ -4174,7 +4174,7 @@
         </p:nvSpPr>
         <p:spPr>
           <a:xfrm>
-            <a:off x="8387842" y="2197100"/>
+            <a:off x="8396478" y="2197100"/>
             <a:ext cx="437388" cy="1092200"/>
           </a:xfrm>
           <a:prstGeom prst="rect">
@@ -4213,7 +4213,7 @@
         </p:nvSpPr>
         <p:spPr>
           <a:xfrm>
-            <a:off x="9027993" y="2263338"/>
+            <a:off x="9036629" y="2263338"/>
             <a:ext cx="377048" cy="377048"/>
           </a:xfrm>
           <a:prstGeom prst="rect">
@@ -4238,7 +4238,7 @@
         </p:nvSpPr>
         <p:spPr>
           <a:xfrm>
-            <a:off x="8971534" y="2743200"/>
+            <a:off x="8980170" y="2743200"/>
             <a:ext cx="489966" cy="0"/>
           </a:xfrm>
           <a:prstGeom prst="line">
@@ -4261,7 +4261,7 @@
         </p:nvSpPr>
         <p:spPr>
           <a:xfrm>
-            <a:off x="8934958" y="2779776"/>
+            <a:off x="8943594" y="2779776"/>
             <a:ext cx="563118" cy="509524"/>
           </a:xfrm>
           <a:prstGeom prst="rect">
@@ -5247,7 +5247,7 @@
         <p:spPr>
           <a:xfrm>
             <a:off x="7072884" y="2197100"/>
-            <a:ext cx="532384" cy="1092200"/>
+            <a:ext cx="541020" cy="1092200"/>
           </a:xfrm>
           <a:prstGeom prst="rect">
             <a:avLst/>
@@ -5285,7 +5285,7 @@
         </p:nvSpPr>
         <p:spPr>
           <a:xfrm>
-            <a:off x="7714996" y="2197100"/>
+            <a:off x="7723632" y="2197100"/>
             <a:ext cx="563118" cy="509524"/>
           </a:xfrm>
           <a:prstGeom prst="rect">
@@ -5324,7 +5324,7 @@
         </p:nvSpPr>
         <p:spPr>
           <a:xfrm>
-            <a:off x="7751572" y="2743200"/>
+            <a:off x="7760208" y="2743200"/>
             <a:ext cx="489966" cy="0"/>
           </a:xfrm>
           <a:prstGeom prst="line">
@@ -5347,7 +5347,7 @@
         </p:nvSpPr>
         <p:spPr>
           <a:xfrm>
-            <a:off x="7714996" y="2779776"/>
+            <a:off x="7723632" y="2779776"/>
             <a:ext cx="563118" cy="509524"/>
           </a:xfrm>
           <a:prstGeom prst="rect">
@@ -5386,7 +5386,7 @@
         </p:nvSpPr>
         <p:spPr>
           <a:xfrm>
-            <a:off x="8387842" y="2197100"/>
+            <a:off x="8396478" y="2197100"/>
             <a:ext cx="437388" cy="1092200"/>
           </a:xfrm>
           <a:prstGeom prst="rect">
@@ -5425,7 +5425,7 @@
         </p:nvSpPr>
         <p:spPr>
           <a:xfrm>
-            <a:off x="9027993" y="2263338"/>
+            <a:off x="9036629" y="2263338"/>
             <a:ext cx="377048" cy="377048"/>
           </a:xfrm>
           <a:prstGeom prst="rect">
@@ -5450,7 +5450,7 @@
         </p:nvSpPr>
         <p:spPr>
           <a:xfrm>
-            <a:off x="8971534" y="2743200"/>
+            <a:off x="8980170" y="2743200"/>
             <a:ext cx="489966" cy="0"/>
           </a:xfrm>
           <a:prstGeom prst="line">
@@ -5473,7 +5473,7 @@
         </p:nvSpPr>
         <p:spPr>
           <a:xfrm>
-            <a:off x="8934958" y="2779776"/>
+            <a:off x="8943594" y="2779776"/>
             <a:ext cx="563118" cy="509524"/>
           </a:xfrm>
           <a:prstGeom prst="rect">
@@ -5859,7 +5859,7 @@
         <p:spPr>
           <a:xfrm>
             <a:off x="7072884" y="4391660"/>
-            <a:ext cx="532384" cy="1092200"/>
+            <a:ext cx="541020" cy="1092200"/>
           </a:xfrm>
           <a:prstGeom prst="rect">
             <a:avLst/>
@@ -5897,7 +5897,7 @@
         </p:nvSpPr>
         <p:spPr>
           <a:xfrm>
-            <a:off x="7714996" y="4391660"/>
+            <a:off x="7723632" y="4391660"/>
             <a:ext cx="563118" cy="509524"/>
           </a:xfrm>
           <a:prstGeom prst="rect">
@@ -5936,7 +5936,7 @@
         </p:nvSpPr>
         <p:spPr>
           <a:xfrm>
-            <a:off x="7751572" y="4937760"/>
+            <a:off x="7760208" y="4937760"/>
             <a:ext cx="489966" cy="0"/>
           </a:xfrm>
           <a:prstGeom prst="line">
@@ -5959,7 +5959,7 @@
         </p:nvSpPr>
         <p:spPr>
           <a:xfrm>
-            <a:off x="7714996" y="4974336"/>
+            <a:off x="7723632" y="4974336"/>
             <a:ext cx="563118" cy="509524"/>
           </a:xfrm>
           <a:prstGeom prst="rect">
@@ -5998,7 +5998,7 @@
         </p:nvSpPr>
         <p:spPr>
           <a:xfrm>
-            <a:off x="8387842" y="4391660"/>
+            <a:off x="8396478" y="4391660"/>
             <a:ext cx="437388" cy="1092200"/>
           </a:xfrm>
           <a:prstGeom prst="rect">
@@ -6037,7 +6037,7 @@
         </p:nvSpPr>
         <p:spPr>
           <a:xfrm>
-            <a:off x="9027993" y="4457898"/>
+            <a:off x="9036629" y="4457898"/>
             <a:ext cx="377048" cy="377048"/>
           </a:xfrm>
           <a:prstGeom prst="rect">
@@ -6062,7 +6062,7 @@
         </p:nvSpPr>
         <p:spPr>
           <a:xfrm>
-            <a:off x="8971534" y="4937760"/>
+            <a:off x="8980170" y="4937760"/>
             <a:ext cx="489966" cy="0"/>
           </a:xfrm>
           <a:prstGeom prst="line">
@@ -6085,7 +6085,7 @@
         </p:nvSpPr>
         <p:spPr>
           <a:xfrm>
-            <a:off x="8934958" y="4974336"/>
+            <a:off x="8943594" y="4974336"/>
             <a:ext cx="563118" cy="509524"/>
           </a:xfrm>
           <a:prstGeom prst="rect">
@@ -7890,7 +7890,7 @@
         <p:spPr>
           <a:xfrm>
             <a:off x="5036312" y="4402328"/>
-            <a:ext cx="483616" cy="912368"/>
+            <a:ext cx="490728" cy="912368"/>
           </a:xfrm>
           <a:prstGeom prst="rect">
             <a:avLst/>
@@ -7928,7 +7928,7 @@
         </p:nvSpPr>
         <p:spPr>
           <a:xfrm>
-            <a:off x="5629656" y="4402328"/>
+            <a:off x="5636768" y="4402328"/>
             <a:ext cx="483108" cy="419608"/>
           </a:xfrm>
           <a:prstGeom prst="rect">
@@ -7967,7 +7967,7 @@
         </p:nvSpPr>
         <p:spPr>
           <a:xfrm>
-            <a:off x="5666232" y="4858512"/>
+            <a:off x="5673344" y="4858512"/>
             <a:ext cx="409956" cy="0"/>
           </a:xfrm>
           <a:prstGeom prst="line">
@@ -7990,7 +7990,7 @@
         </p:nvSpPr>
         <p:spPr>
           <a:xfrm>
-            <a:off x="5629656" y="4895088"/>
+            <a:off x="5636768" y="4895088"/>
             <a:ext cx="483108" cy="419608"/>
           </a:xfrm>
           <a:prstGeom prst="rect">
@@ -8029,7 +8029,7 @@
         </p:nvSpPr>
         <p:spPr>
           <a:xfrm>
-            <a:off x="6222492" y="4402328"/>
+            <a:off x="6229604" y="4402328"/>
             <a:ext cx="405384" cy="912368"/>
           </a:xfrm>
           <a:prstGeom prst="rect">
@@ -8068,7 +8068,7 @@
         </p:nvSpPr>
         <p:spPr>
           <a:xfrm>
-            <a:off x="6823903" y="4456877"/>
+            <a:off x="6831015" y="4456877"/>
             <a:ext cx="310510" cy="310510"/>
           </a:xfrm>
           <a:prstGeom prst="rect">
@@ -8093,7 +8093,7 @@
         </p:nvSpPr>
         <p:spPr>
           <a:xfrm>
-            <a:off x="6774180" y="4858512"/>
+            <a:off x="6781292" y="4858512"/>
             <a:ext cx="409956" cy="0"/>
           </a:xfrm>
           <a:prstGeom prst="line">
@@ -8116,7 +8116,7 @@
         </p:nvSpPr>
         <p:spPr>
           <a:xfrm>
-            <a:off x="6737604" y="4895088"/>
+            <a:off x="6744716" y="4895088"/>
             <a:ext cx="483108" cy="419608"/>
           </a:xfrm>
           <a:prstGeom prst="rect">
@@ -9775,7 +9775,7 @@
         <p:spPr>
           <a:xfrm>
             <a:off x="1344168" y="5031740"/>
-            <a:ext cx="1231900" cy="1092200"/>
+            <a:ext cx="1249172" cy="1092200"/>
           </a:xfrm>
           <a:prstGeom prst="rect">
             <a:avLst/>
@@ -9813,7 +9813,7 @@
         </p:nvSpPr>
         <p:spPr>
           <a:xfrm>
-            <a:off x="2685796" y="5031740"/>
+            <a:off x="2703068" y="5031740"/>
             <a:ext cx="563118" cy="509524"/>
           </a:xfrm>
           <a:prstGeom prst="rect">
@@ -9852,7 +9852,7 @@
         </p:nvSpPr>
         <p:spPr>
           <a:xfrm>
-            <a:off x="2722372" y="5577840"/>
+            <a:off x="2739644" y="5577840"/>
             <a:ext cx="489966" cy="0"/>
           </a:xfrm>
           <a:prstGeom prst="line">
@@ -9875,7 +9875,7 @@
         </p:nvSpPr>
         <p:spPr>
           <a:xfrm>
-            <a:off x="2685796" y="5614416"/>
+            <a:off x="2703068" y="5614416"/>
             <a:ext cx="563118" cy="509524"/>
           </a:xfrm>
           <a:prstGeom prst="rect">
@@ -9914,7 +9914,7 @@
         </p:nvSpPr>
         <p:spPr>
           <a:xfrm>
-            <a:off x="3358642" y="5031740"/>
+            <a:off x="3375914" y="5031740"/>
             <a:ext cx="437388" cy="1092200"/>
           </a:xfrm>
           <a:prstGeom prst="rect">
@@ -9953,7 +9953,7 @@
         </p:nvSpPr>
         <p:spPr>
           <a:xfrm>
-            <a:off x="4056832" y="5389316"/>
+            <a:off x="4074104" y="5389316"/>
             <a:ext cx="377048" cy="377048"/>
           </a:xfrm>
           <a:prstGeom prst="rect">
@@ -10198,7 +10198,7 @@
               <a:buNone/>
             </a:pPr>
             <a:r>
-              <a:rPr lang="ko-KR" altLang="en-US" sz="2400" dirty="0">
+              <a:rPr lang="en-US" altLang="ko-KR" sz="2400" dirty="0">
                 <a:solidFill>
                   <a:srgbClr val="1F2937"/>
                 </a:solidFill>
@@ -12808,8 +12808,8 @@
         </p:nvSpPr>
         <p:spPr>
           <a:xfrm>
-            <a:off x="9274302" y="2012442"/>
-            <a:ext cx="548640" cy="1152144"/>
+            <a:off x="9269730" y="2012442"/>
+            <a:ext cx="557784" cy="1152144"/>
           </a:xfrm>
           <a:prstGeom prst="rect">
             <a:avLst/>
@@ -12847,7 +12847,7 @@
         </p:nvSpPr>
         <p:spPr>
           <a:xfrm>
-            <a:off x="9932670" y="2012442"/>
+            <a:off x="9937242" y="2012442"/>
             <a:ext cx="589788" cy="539496"/>
           </a:xfrm>
           <a:prstGeom prst="rect">
@@ -12886,7 +12886,7 @@
         </p:nvSpPr>
         <p:spPr>
           <a:xfrm>
-            <a:off x="9969246" y="2588514"/>
+            <a:off x="9973818" y="2588514"/>
             <a:ext cx="516636" cy="0"/>
           </a:xfrm>
           <a:prstGeom prst="line">
@@ -12909,7 +12909,7 @@
         </p:nvSpPr>
         <p:spPr>
           <a:xfrm>
-            <a:off x="9932670" y="2625090"/>
+            <a:off x="9937242" y="2625090"/>
             <a:ext cx="589788" cy="539496"/>
           </a:xfrm>
           <a:prstGeom prst="rect">
@@ -13553,7 +13553,7 @@
         <p:spPr>
           <a:xfrm>
             <a:off x="1344168" y="3109976"/>
-            <a:ext cx="483616" cy="912368"/>
+            <a:ext cx="490728" cy="912368"/>
           </a:xfrm>
           <a:prstGeom prst="rect">
             <a:avLst/>
@@ -13591,7 +13591,7 @@
         </p:nvSpPr>
         <p:spPr>
           <a:xfrm>
-            <a:off x="1937512" y="3109976"/>
+            <a:off x="1944624" y="3109976"/>
             <a:ext cx="483108" cy="419608"/>
           </a:xfrm>
           <a:prstGeom prst="rect">
@@ -13630,7 +13630,7 @@
         </p:nvSpPr>
         <p:spPr>
           <a:xfrm>
-            <a:off x="1974088" y="3566160"/>
+            <a:off x="1981200" y="3566160"/>
             <a:ext cx="409956" cy="0"/>
           </a:xfrm>
           <a:prstGeom prst="line">
@@ -13653,7 +13653,7 @@
         </p:nvSpPr>
         <p:spPr>
           <a:xfrm>
-            <a:off x="1937512" y="3602736"/>
+            <a:off x="1944624" y="3602736"/>
             <a:ext cx="483108" cy="419608"/>
           </a:xfrm>
           <a:prstGeom prst="rect">
@@ -13888,7 +13888,7 @@
         <p:spPr>
           <a:xfrm>
             <a:off x="1344168" y="4207256"/>
-            <a:ext cx="483616" cy="912368"/>
+            <a:ext cx="490728" cy="912368"/>
           </a:xfrm>
           <a:prstGeom prst="rect">
             <a:avLst/>
@@ -13926,7 +13926,7 @@
         </p:nvSpPr>
         <p:spPr>
           <a:xfrm>
-            <a:off x="1937512" y="4207256"/>
+            <a:off x="1944624" y="4207256"/>
             <a:ext cx="483108" cy="419608"/>
           </a:xfrm>
           <a:prstGeom prst="rect">
@@ -13965,7 +13965,7 @@
         </p:nvSpPr>
         <p:spPr>
           <a:xfrm>
-            <a:off x="1974088" y="4663440"/>
+            <a:off x="1981200" y="4663440"/>
             <a:ext cx="409956" cy="0"/>
           </a:xfrm>
           <a:prstGeom prst="line">
@@ -13988,7 +13988,7 @@
         </p:nvSpPr>
         <p:spPr>
           <a:xfrm>
-            <a:off x="1937512" y="4700016"/>
+            <a:off x="1944624" y="4700016"/>
             <a:ext cx="483108" cy="419608"/>
           </a:xfrm>
           <a:prstGeom prst="rect">
@@ -15121,7 +15121,7 @@
         <p:spPr>
           <a:xfrm>
             <a:off x="548640" y="1351280"/>
-            <a:ext cx="532384" cy="1092200"/>
+            <a:ext cx="541020" cy="1092200"/>
           </a:xfrm>
           <a:prstGeom prst="rect">
             <a:avLst/>
@@ -15159,7 +15159,7 @@
         </p:nvSpPr>
         <p:spPr>
           <a:xfrm>
-            <a:off x="1190752" y="1351280"/>
+            <a:off x="1199388" y="1351280"/>
             <a:ext cx="563118" cy="509524"/>
           </a:xfrm>
           <a:prstGeom prst="rect">
@@ -15198,7 +15198,7 @@
         </p:nvSpPr>
         <p:spPr>
           <a:xfrm>
-            <a:off x="1227328" y="1897380"/>
+            <a:off x="1235964" y="1897380"/>
             <a:ext cx="489966" cy="0"/>
           </a:xfrm>
           <a:prstGeom prst="line">
@@ -15221,7 +15221,7 @@
         </p:nvSpPr>
         <p:spPr>
           <a:xfrm>
-            <a:off x="1190752" y="1933956"/>
+            <a:off x="1199388" y="1933956"/>
             <a:ext cx="563118" cy="509524"/>
           </a:xfrm>
           <a:prstGeom prst="rect">
@@ -15260,7 +15260,7 @@
         </p:nvSpPr>
         <p:spPr>
           <a:xfrm>
-            <a:off x="1863598" y="1351280"/>
+            <a:off x="1872234" y="1351280"/>
             <a:ext cx="437388" cy="1092200"/>
           </a:xfrm>
           <a:prstGeom prst="rect">
@@ -15299,7 +15299,7 @@
         </p:nvSpPr>
         <p:spPr>
           <a:xfrm>
-            <a:off x="2503749" y="1417518"/>
+            <a:off x="2512385" y="1417518"/>
             <a:ext cx="377048" cy="377048"/>
           </a:xfrm>
           <a:prstGeom prst="rect">
@@ -15324,7 +15324,7 @@
         </p:nvSpPr>
         <p:spPr>
           <a:xfrm>
-            <a:off x="2447290" y="1897380"/>
+            <a:off x="2455926" y="1897380"/>
             <a:ext cx="489966" cy="0"/>
           </a:xfrm>
           <a:prstGeom prst="line">
@@ -15347,7 +15347,7 @@
         </p:nvSpPr>
         <p:spPr>
           <a:xfrm>
-            <a:off x="2410714" y="1933956"/>
+            <a:off x="2419350" y="1933956"/>
             <a:ext cx="563118" cy="509524"/>
           </a:xfrm>
           <a:prstGeom prst="rect">

--- a/dist/초3/수학/분수와소수/초3_수학_분수와소수_05_진분수·가분수·대분수.pptx
+++ b/dist/초3/수학/분수와소수/초3_수학_분수와소수_05_진분수·가분수·대분수.pptx
@@ -121,13 +121,13 @@
   <p:extLst>
     <p:ext uri="{521415D9-36F7-43E2-AB2F-B90AF26B5E84}">
       <p14:sectionLst xmlns:p14="http://schemas.microsoft.com/office/powerpoint/2010/main">
-        <p14:section name="도입" id="{bd10ca98-64ef-add9-77af-138461f2c4fb}">
+        <p14:section name="도입" id="{11dba403-44a5-4860-be54-6c065fa86340}">
           <p14:sldIdLst>
             <p14:sldId id="256"/>
             <p14:sldId id="257"/>
           </p14:sldIdLst>
         </p14:section>
-        <p14:section name="개념" id="{fdb4656e-96f7-1424-bc51-1d31f0687a1a}">
+        <p14:section name="개념" id="{17e69400-5ff9-96dd-e9c5-14bdba9d1732}">
           <p14:sldIdLst>
             <p14:sldId id="258"/>
             <p14:sldId id="259"/>
@@ -136,32 +136,32 @@
             <p14:sldId id="264"/>
           </p14:sldIdLst>
         </p14:section>
-        <p14:section name="연습" id="{c58383ac-edab-2095-51df-ba3d3cb031eb}">
+        <p14:section name="연습" id="{816963b5-277f-278f-89c1-ae2d1d0b772f}">
           <p14:sldIdLst>
             <p14:sldId id="261"/>
             <p14:sldId id="262"/>
             <p14:sldId id="265"/>
           </p14:sldIdLst>
         </p14:section>
-        <p14:section name="개념" id="{4cdd5f2e-ab8c-3f5e-48e5-9afedd912232}">
+        <p14:section name="개념" id="{ea834bb1-6d20-9b3f-3275-a415d29621ed}">
           <p14:sldIdLst/>
         </p14:section>
-        <p14:section name="연습" id="{35ae9729-9ad1-74ee-a7f8-ced8ec152514}">
+        <p14:section name="연습" id="{97227286-2d87-fc0f-b3e0-866bd9e2ff70}">
           <p14:sldIdLst/>
         </p14:section>
-        <p14:section name="확인" id="{37c6a822-96b5-9a7a-8323-bd7bb74782ba}">
+        <p14:section name="확인" id="{c07ca857-737a-1abe-3bc0-515732cd1b79}">
           <p14:sldIdLst>
             <p14:sldId id="266"/>
             <p14:sldId id="267"/>
             <p14:sldId id="268"/>
           </p14:sldIdLst>
         </p14:section>
-        <p14:section name="정리" id="{b97a779a-dd08-81fa-87fe-1d4f6c77dcd1}">
+        <p14:section name="정리" id="{b8b657b6-142a-9f72-8882-bced3ea97ccd}">
           <p14:sldIdLst>
             <p14:sldId id="269"/>
           </p14:sldIdLst>
         </p14:section>
-        <p14:section name="보충" id="{6c16e13e-0c64-c1b7-df29-a440db43907a}">
+        <p14:section name="보충" id="{6cf07f24-786a-e1cf-2ad2-fed10dd5cbf2}">
           <p14:sldIdLst>
             <p14:sldId id="270"/>
           </p14:sldIdLst>
